--- a/classes/parte-4-seguridad-de-aplicaciones-web/115-secure-coding-y-defensa-de-aplicaciones-web/clase-115-presentacion.pptx
+++ b/classes/parte-4-seguridad-de-aplicaciones-web/115-secure-coding-y-defensa-de-aplicaciones-web/clase-115-presentacion.pptx
@@ -17,6 +17,9 @@
     <p:sldId id="265" r:id="rId16"/>
     <p:sldId id="266" r:id="rId17"/>
     <p:sldId id="267" r:id="rId18"/>
+    <p:sldId id="268" r:id="rId19"/>
+    <p:sldId id="269" r:id="rId20"/>
+    <p:sldId id="270" r:id="rId21"/>
   </p:sldIdLst>
   <p:sldSz cx="9144000" cy="6858000" type="screen4x3"/>
   <p:notesSz cx="6858000" cy="9144000"/>
@@ -3198,7 +3201,7 @@
                   <a:srgbClr val="0B3D2E"/>
                 </a:solidFill>
               </a:rPr>
-              <a:t>⚠️ Errores comunes</a:t>
+              <a:t>✍️ Ejercicios</a:t>
             </a:r>
           </a:p>
         </p:txBody>
@@ -3236,67 +3239,82 @@
                   <a:srgbClr val="22282E"/>
                 </a:solidFill>
               </a:rPr>
-              <a:t>•  Escapar en vez de parametrizar — Frágil; usa prepared statements</a:t>
-            </a:r>
-          </a:p>
-          <a:p>
-            <a:pPr>
-              <a:spcAft>
-                <a:spcPts val="600"/>
-              </a:spcAft>
-            </a:pPr>
-            <a:r>
-              <a:rPr sz="1500">
-                <a:solidFill>
-                  <a:srgbClr val="22282E"/>
-                </a:solidFill>
-              </a:rPr>
-              <a:t>•  CSP con unsafe-inline — Anula la protección; elimina inline y usa nonces</a:t>
-            </a:r>
-          </a:p>
-          <a:p>
-            <a:pPr>
-              <a:spcAft>
-                <a:spcPts val="600"/>
-              </a:spcAft>
-            </a:pPr>
-            <a:r>
-              <a:rPr sz="1500">
-                <a:solidFill>
-                  <a:srgbClr val="22282E"/>
-                </a:solidFill>
-              </a:rPr>
-              <a:t>•  Validación solo en cliente — Inútil como control; valida en servidor</a:t>
-            </a:r>
-          </a:p>
-          <a:p>
-            <a:pPr>
-              <a:spcAft>
-                <a:spcPts val="600"/>
-              </a:spcAft>
-            </a:pPr>
-            <a:r>
-              <a:rPr sz="1500">
-                <a:solidFill>
-                  <a:srgbClr val="22282E"/>
-                </a:solidFill>
-              </a:rPr>
-              <a:t>•  Blocklists en vez de allowlists — Se evaden; prefiere allowlists</a:t>
-            </a:r>
-          </a:p>
-          <a:p>
-            <a:pPr>
-              <a:spcAft>
-                <a:spcPts val="600"/>
-              </a:spcAft>
-            </a:pPr>
-            <a:r>
-              <a:rPr sz="1500">
-                <a:solidFill>
-                  <a:srgbClr val="22282E"/>
-                </a:solidFill>
-              </a:rPr>
-              <a:t>•  Secretos en el repositorio — Fuga; usa gestores de secretos y rota lo expuesto</a:t>
+              <a:t>•  Reescribe de forma segura una query vulnerable en dos lenguajes.</a:t>
+            </a:r>
+          </a:p>
+          <a:p>
+            <a:pPr>
+              <a:spcAft>
+                <a:spcPts val="600"/>
+              </a:spcAft>
+            </a:pPr>
+            <a:r>
+              <a:rPr sz="1500">
+                <a:solidFill>
+                  <a:srgbClr val="22282E"/>
+                </a:solidFill>
+              </a:rPr>
+              <a:t>•  Diseña una CSP para una SPA que solo cargue scripts propios.</a:t>
+            </a:r>
+          </a:p>
+          <a:p>
+            <a:pPr>
+              <a:spcAft>
+                <a:spcPts val="600"/>
+              </a:spcAft>
+            </a:pPr>
+            <a:r>
+              <a:rPr sz="1500">
+                <a:solidFill>
+                  <a:srgbClr val="22282E"/>
+                </a:solidFill>
+              </a:rPr>
+              <a:t>•  Configura las cookies de sesión ideales y justifícalo.</a:t>
+            </a:r>
+          </a:p>
+          <a:p>
+            <a:pPr>
+              <a:spcAft>
+                <a:spcPts val="600"/>
+              </a:spcAft>
+            </a:pPr>
+            <a:r>
+              <a:rPr sz="1500">
+                <a:solidFill>
+                  <a:srgbClr val="22282E"/>
+                </a:solidFill>
+              </a:rPr>
+              <a:t>•  Corrige un IDOR añadiendo autorización a nivel de objeto.</a:t>
+            </a:r>
+          </a:p>
+          <a:p>
+            <a:pPr>
+              <a:spcAft>
+                <a:spcPts val="600"/>
+              </a:spcAft>
+            </a:pPr>
+            <a:r>
+              <a:rPr sz="1500">
+                <a:solidFill>
+                  <a:srgbClr val="22282E"/>
+                </a:solidFill>
+              </a:rPr>
+              <a:t>•  Añade validación de entrada con allowlist en un endpoint.</a:t>
+            </a:r>
+          </a:p>
+          <a:p>
+            <a:pPr>
+              <a:spcAft>
+                <a:spcPts val="600"/>
+              </a:spcAft>
+            </a:pPr>
+            <a:r>
+              <a:rPr sz="1500">
+                <a:solidFill>
+                  <a:srgbClr val="22282E"/>
+                </a:solidFill>
+              </a:rPr>
+              <a:t>•  Mapea 10 controles de secure coding a las categorías del OWASP Top 10.</a:t>
             </a:r>
           </a:p>
         </p:txBody>
@@ -3347,7 +3365,7 @@
                   <a:srgbClr val="0B3D2E"/>
                 </a:solidFill>
               </a:rPr>
-              <a:t>❓ Preguntas frecuentes</a:t>
+              <a:t>📝 Reto verificable</a:t>
             </a:r>
           </a:p>
         </p:txBody>
@@ -3385,82 +3403,22 @@
                   <a:srgbClr val="22282E"/>
                 </a:solidFill>
               </a:rPr>
-              <a:t>•  ❓ ¿Por dónde empiezo a asegurar una app?</a:t>
-            </a:r>
-          </a:p>
-          <a:p>
-            <a:pPr>
-              <a:spcAft>
-                <a:spcPts val="600"/>
-              </a:spcAft>
-            </a:pPr>
-            <a:r>
-              <a:rPr sz="1500">
-                <a:solidFill>
-                  <a:srgbClr val="22282E"/>
-                </a:solidFill>
-              </a:rPr>
-              <a:t>•  Por las categorías de mayor impacto en tu contexto (a menudo access control e inyección) y por un baseline de cabeceras y gestión de sesión.</a:t>
-            </a:r>
-          </a:p>
-          <a:p>
-            <a:pPr>
-              <a:spcAft>
-                <a:spcPts val="600"/>
-              </a:spcAft>
-            </a:pPr>
-            <a:r>
-              <a:rPr sz="1500">
-                <a:solidFill>
-                  <a:srgbClr val="22282E"/>
-                </a:solidFill>
-              </a:rPr>
-              <a:t>•  ❓ ¿SAST o DAST?</a:t>
-            </a:r>
-          </a:p>
-          <a:p>
-            <a:pPr>
-              <a:spcAft>
-                <a:spcPts val="600"/>
-              </a:spcAft>
-            </a:pPr>
-            <a:r>
-              <a:rPr sz="1500">
-                <a:solidFill>
-                  <a:srgbClr val="22282E"/>
-                </a:solidFill>
-              </a:rPr>
-              <a:t>•  Ambos: SAST encuentra fallos en el código, DAST en la app corriendo. Complétalos con SCA para dependencias.</a:t>
-            </a:r>
-          </a:p>
-          <a:p>
-            <a:pPr>
-              <a:spcAft>
-                <a:spcPts val="600"/>
-              </a:spcAft>
-            </a:pPr>
-            <a:r>
-              <a:rPr sz="1500">
-                <a:solidFill>
-                  <a:srgbClr val="22282E"/>
-                </a:solidFill>
-              </a:rPr>
-              <a:t>•  ❓ ¿Qué nivel de ASVS busco?</a:t>
-            </a:r>
-          </a:p>
-          <a:p>
-            <a:pPr>
-              <a:spcAft>
-                <a:spcPts val="600"/>
-              </a:spcAft>
-            </a:pPr>
-            <a:r>
-              <a:rPr sz="1500">
-                <a:solidFill>
-                  <a:srgbClr val="22282E"/>
-                </a:solidFill>
-              </a:rPr>
-              <a:t>•  Nivel 1 como mínimo para cualquier app; niveles 2–3 para aplicaciones sensibles o reguladas.</a:t>
+              <a:t>•  Toma una aplicación vulnerable (Juice Shop/DVWA o un proyecto propio) y corrige al menos 3 vulnerabilidades de categorías distintas, verificando que el ataque original ya no funciona.</a:t>
+            </a:r>
+          </a:p>
+          <a:p>
+            <a:pPr>
+              <a:spcAft>
+                <a:spcPts val="600"/>
+              </a:spcAft>
+            </a:pPr>
+            <a:r>
+              <a:rPr sz="1500">
+                <a:solidFill>
+                  <a:srgbClr val="22282E"/>
+                </a:solidFill>
+              </a:rPr>
+              <a:t>•  Criterio de aceptación: entregas el diff/código corregido de 3 fallos (p. ej. SQLi, XSS, IDOR), demuestras que el exploit previo falla tras el cambio, y mapeas cada corrección a su categoría OWASP y…</a:t>
             </a:r>
           </a:p>
         </p:txBody>
@@ -3511,7 +3469,7 @@
                   <a:srgbClr val="0B3D2E"/>
                 </a:solidFill>
               </a:rPr>
-              <a:t>🔗 Referencias</a:t>
+              <a:t>⚠️ Errores comunes</a:t>
             </a:r>
           </a:p>
         </p:txBody>
@@ -3549,6 +3507,319 @@
                   <a:srgbClr val="22282E"/>
                 </a:solidFill>
               </a:rPr>
+              <a:t>•  Escapar en vez de parametrizar — Frágil; usa prepared statements</a:t>
+            </a:r>
+          </a:p>
+          <a:p>
+            <a:pPr>
+              <a:spcAft>
+                <a:spcPts val="600"/>
+              </a:spcAft>
+            </a:pPr>
+            <a:r>
+              <a:rPr sz="1500">
+                <a:solidFill>
+                  <a:srgbClr val="22282E"/>
+                </a:solidFill>
+              </a:rPr>
+              <a:t>•  CSP con unsafe-inline — Anula la protección; elimina inline y usa nonces</a:t>
+            </a:r>
+          </a:p>
+          <a:p>
+            <a:pPr>
+              <a:spcAft>
+                <a:spcPts val="600"/>
+              </a:spcAft>
+            </a:pPr>
+            <a:r>
+              <a:rPr sz="1500">
+                <a:solidFill>
+                  <a:srgbClr val="22282E"/>
+                </a:solidFill>
+              </a:rPr>
+              <a:t>•  Validación solo en cliente — Inútil como control; valida en servidor</a:t>
+            </a:r>
+          </a:p>
+          <a:p>
+            <a:pPr>
+              <a:spcAft>
+                <a:spcPts val="600"/>
+              </a:spcAft>
+            </a:pPr>
+            <a:r>
+              <a:rPr sz="1500">
+                <a:solidFill>
+                  <a:srgbClr val="22282E"/>
+                </a:solidFill>
+              </a:rPr>
+              <a:t>•  Blocklists en vez de allowlists — Se evaden; prefiere allowlists</a:t>
+            </a:r>
+          </a:p>
+          <a:p>
+            <a:pPr>
+              <a:spcAft>
+                <a:spcPts val="600"/>
+              </a:spcAft>
+            </a:pPr>
+            <a:r>
+              <a:rPr sz="1500">
+                <a:solidFill>
+                  <a:srgbClr val="22282E"/>
+                </a:solidFill>
+              </a:rPr>
+              <a:t>•  Secretos en el repositorio — Fuga; usa gestores de secretos y rota lo expuesto</a:t>
+            </a:r>
+          </a:p>
+        </p:txBody>
+      </p:sp>
+    </p:spTree>
+  </p:cSld>
+  <p:clrMapOvr>
+    <a:masterClrMapping/>
+  </p:clrMapOvr>
+</p:sld>
+</file>
+
+<file path=ppt/slides/slide13.xml><?xml version="1.0" encoding="utf-8"?>
+<p:sld xmlns:a="http://schemas.openxmlformats.org/drawingml/2006/main" xmlns:p="http://schemas.openxmlformats.org/presentationml/2006/main" xmlns:r="http://schemas.openxmlformats.org/officeDocument/2006/relationships">
+  <p:cSld>
+    <p:spTree>
+      <p:nvGrpSpPr>
+        <p:cNvPr id="1" name=""/>
+        <p:cNvGrpSpPr/>
+        <p:nvPr/>
+      </p:nvGrpSpPr>
+      <p:grpSpPr/>
+      <p:sp>
+        <p:nvSpPr>
+          <p:cNvPr id="2" name="TextBox 1"/>
+          <p:cNvSpPr txBox="1"/>
+          <p:nvPr/>
+        </p:nvSpPr>
+        <p:spPr>
+          <a:xfrm>
+            <a:off x="457200" y="320040"/>
+            <a:ext cx="8229600" cy="822960"/>
+          </a:xfrm>
+          <a:prstGeom prst="rect">
+            <a:avLst/>
+          </a:prstGeom>
+          <a:noFill/>
+        </p:spPr>
+        <p:txBody>
+          <a:bodyPr wrap="square">
+            <a:spAutoFit/>
+          </a:bodyPr>
+          <a:lstStyle/>
+          <a:p>
+            <a:r>
+              <a:rPr sz="2600" b="1">
+                <a:solidFill>
+                  <a:srgbClr val="0B3D2E"/>
+                </a:solidFill>
+              </a:rPr>
+              <a:t>❓ Preguntas frecuentes</a:t>
+            </a:r>
+          </a:p>
+        </p:txBody>
+      </p:sp>
+      <p:sp>
+        <p:nvSpPr>
+          <p:cNvPr id="3" name="TextBox 2"/>
+          <p:cNvSpPr txBox="1"/>
+          <p:nvPr/>
+        </p:nvSpPr>
+        <p:spPr>
+          <a:xfrm>
+            <a:off x="457200" y="1280160"/>
+            <a:ext cx="8229600" cy="4937760"/>
+          </a:xfrm>
+          <a:prstGeom prst="rect">
+            <a:avLst/>
+          </a:prstGeom>
+          <a:noFill/>
+        </p:spPr>
+        <p:txBody>
+          <a:bodyPr wrap="square">
+            <a:spAutoFit/>
+          </a:bodyPr>
+          <a:lstStyle/>
+          <a:p>
+            <a:pPr>
+              <a:spcAft>
+                <a:spcPts val="600"/>
+              </a:spcAft>
+            </a:pPr>
+            <a:r>
+              <a:rPr sz="1500">
+                <a:solidFill>
+                  <a:srgbClr val="22282E"/>
+                </a:solidFill>
+              </a:rPr>
+              <a:t>•  ❓ ¿Por dónde empiezo a asegurar una app?</a:t>
+            </a:r>
+          </a:p>
+          <a:p>
+            <a:pPr>
+              <a:spcAft>
+                <a:spcPts val="600"/>
+              </a:spcAft>
+            </a:pPr>
+            <a:r>
+              <a:rPr sz="1500">
+                <a:solidFill>
+                  <a:srgbClr val="22282E"/>
+                </a:solidFill>
+              </a:rPr>
+              <a:t>•  Por las categorías de mayor impacto en tu contexto (a menudo access control e inyección) y por un baseline de cabeceras y gestión de sesión.</a:t>
+            </a:r>
+          </a:p>
+          <a:p>
+            <a:pPr>
+              <a:spcAft>
+                <a:spcPts val="600"/>
+              </a:spcAft>
+            </a:pPr>
+            <a:r>
+              <a:rPr sz="1500">
+                <a:solidFill>
+                  <a:srgbClr val="22282E"/>
+                </a:solidFill>
+              </a:rPr>
+              <a:t>•  ❓ ¿SAST o DAST?</a:t>
+            </a:r>
+          </a:p>
+          <a:p>
+            <a:pPr>
+              <a:spcAft>
+                <a:spcPts val="600"/>
+              </a:spcAft>
+            </a:pPr>
+            <a:r>
+              <a:rPr sz="1500">
+                <a:solidFill>
+                  <a:srgbClr val="22282E"/>
+                </a:solidFill>
+              </a:rPr>
+              <a:t>•  Ambos: SAST encuentra fallos en el código, DAST en la app corriendo. Complétalos con SCA para dependencias.</a:t>
+            </a:r>
+          </a:p>
+          <a:p>
+            <a:pPr>
+              <a:spcAft>
+                <a:spcPts val="600"/>
+              </a:spcAft>
+            </a:pPr>
+            <a:r>
+              <a:rPr sz="1500">
+                <a:solidFill>
+                  <a:srgbClr val="22282E"/>
+                </a:solidFill>
+              </a:rPr>
+              <a:t>•  ❓ ¿Qué nivel de ASVS busco?</a:t>
+            </a:r>
+          </a:p>
+          <a:p>
+            <a:pPr>
+              <a:spcAft>
+                <a:spcPts val="600"/>
+              </a:spcAft>
+            </a:pPr>
+            <a:r>
+              <a:rPr sz="1500">
+                <a:solidFill>
+                  <a:srgbClr val="22282E"/>
+                </a:solidFill>
+              </a:rPr>
+              <a:t>•  Nivel 1 como mínimo para cualquier app; niveles 2–3 para aplicaciones sensibles o reguladas.</a:t>
+            </a:r>
+          </a:p>
+        </p:txBody>
+      </p:sp>
+    </p:spTree>
+  </p:cSld>
+  <p:clrMapOvr>
+    <a:masterClrMapping/>
+  </p:clrMapOvr>
+</p:sld>
+</file>
+
+<file path=ppt/slides/slide14.xml><?xml version="1.0" encoding="utf-8"?>
+<p:sld xmlns:a="http://schemas.openxmlformats.org/drawingml/2006/main" xmlns:p="http://schemas.openxmlformats.org/presentationml/2006/main" xmlns:r="http://schemas.openxmlformats.org/officeDocument/2006/relationships">
+  <p:cSld>
+    <p:spTree>
+      <p:nvGrpSpPr>
+        <p:cNvPr id="1" name=""/>
+        <p:cNvGrpSpPr/>
+        <p:nvPr/>
+      </p:nvGrpSpPr>
+      <p:grpSpPr/>
+      <p:sp>
+        <p:nvSpPr>
+          <p:cNvPr id="2" name="TextBox 1"/>
+          <p:cNvSpPr txBox="1"/>
+          <p:nvPr/>
+        </p:nvSpPr>
+        <p:spPr>
+          <a:xfrm>
+            <a:off x="457200" y="320040"/>
+            <a:ext cx="8229600" cy="822960"/>
+          </a:xfrm>
+          <a:prstGeom prst="rect">
+            <a:avLst/>
+          </a:prstGeom>
+          <a:noFill/>
+        </p:spPr>
+        <p:txBody>
+          <a:bodyPr wrap="square">
+            <a:spAutoFit/>
+          </a:bodyPr>
+          <a:lstStyle/>
+          <a:p>
+            <a:r>
+              <a:rPr sz="2600" b="1">
+                <a:solidFill>
+                  <a:srgbClr val="0B3D2E"/>
+                </a:solidFill>
+              </a:rPr>
+              <a:t>🔗 Referencias</a:t>
+            </a:r>
+          </a:p>
+        </p:txBody>
+      </p:sp>
+      <p:sp>
+        <p:nvSpPr>
+          <p:cNvPr id="3" name="TextBox 2"/>
+          <p:cNvSpPr txBox="1"/>
+          <p:nvPr/>
+        </p:nvSpPr>
+        <p:spPr>
+          <a:xfrm>
+            <a:off x="457200" y="1280160"/>
+            <a:ext cx="8229600" cy="4937760"/>
+          </a:xfrm>
+          <a:prstGeom prst="rect">
+            <a:avLst/>
+          </a:prstGeom>
+          <a:noFill/>
+        </p:spPr>
+        <p:txBody>
+          <a:bodyPr wrap="square">
+            <a:spAutoFit/>
+          </a:bodyPr>
+          <a:lstStyle/>
+          <a:p>
+            <a:pPr>
+              <a:spcAft>
+                <a:spcPts val="600"/>
+              </a:spcAft>
+            </a:pPr>
+            <a:r>
+              <a:rPr sz="1500">
+                <a:solidFill>
+                  <a:srgbClr val="22282E"/>
+                </a:solidFill>
+              </a:rPr>
               <a:t>•  OWASP ASVS: &lt;https://owasp.org/www-project-application-security-verification-standard/&gt;</a:t>
             </a:r>
           </a:p>
@@ -3599,6 +3870,81 @@
           </a:p>
         </p:txBody>
       </p:sp>
+    </p:spTree>
+  </p:cSld>
+  <p:clrMapOvr>
+    <a:masterClrMapping/>
+  </p:clrMapOvr>
+</p:sld>
+</file>
+
+<file path=ppt/slides/slide15.xml><?xml version="1.0" encoding="utf-8"?>
+<p:sld xmlns:a="http://schemas.openxmlformats.org/drawingml/2006/main" xmlns:p="http://schemas.openxmlformats.org/presentationml/2006/main" xmlns:r="http://schemas.openxmlformats.org/officeDocument/2006/relationships">
+  <p:cSld>
+    <p:spTree>
+      <p:nvGrpSpPr>
+        <p:cNvPr id="1" name=""/>
+        <p:cNvGrpSpPr/>
+        <p:nvPr/>
+      </p:nvGrpSpPr>
+      <p:grpSpPr/>
+      <p:sp>
+        <p:nvSpPr>
+          <p:cNvPr id="2" name="TextBox 1"/>
+          <p:cNvSpPr txBox="1"/>
+          <p:nvPr/>
+        </p:nvSpPr>
+        <p:spPr>
+          <a:xfrm>
+            <a:off x="457200" y="274320"/>
+            <a:ext cx="8229600" cy="640080"/>
+          </a:xfrm>
+          <a:prstGeom prst="rect">
+            <a:avLst/>
+          </a:prstGeom>
+          <a:noFill/>
+        </p:spPr>
+        <p:txBody>
+          <a:bodyPr wrap="square">
+            <a:spAutoFit/>
+          </a:bodyPr>
+          <a:lstStyle/>
+          <a:p>
+            <a:r>
+              <a:rPr sz="2200" b="1">
+                <a:solidFill>
+                  <a:srgbClr val="0B3D2E"/>
+                </a:solidFill>
+              </a:rPr>
+              <a:t>Diagrama de la clase</a:t>
+            </a:r>
+          </a:p>
+        </p:txBody>
+      </p:sp>
+      <p:pic>
+        <p:nvPicPr>
+          <p:cNvPr id="3" name="Picture 2" descr="f0ee1ac41bc0f4c6.png"/>
+          <p:cNvPicPr>
+            <a:picLocks noChangeAspect="1"/>
+          </p:cNvPicPr>
+          <p:nvPr/>
+        </p:nvPicPr>
+        <p:blipFill>
+          <a:blip r:embed="rId2"/>
+          <a:stretch>
+            <a:fillRect/>
+          </a:stretch>
+        </p:blipFill>
+        <p:spPr>
+          <a:xfrm>
+            <a:off x="457200" y="2295144"/>
+            <a:ext cx="8229600" cy="2907792"/>
+          </a:xfrm>
+          <a:prstGeom prst="rect">
+            <a:avLst/>
+          </a:prstGeom>
+        </p:spPr>
+      </p:pic>
     </p:spTree>
   </p:cSld>
   <p:clrMapOvr>
@@ -3683,7 +4029,7 @@
                   <a:srgbClr val="22282E"/>
                 </a:solidFill>
               </a:rPr>
-              <a:t>•  Cerrar la parte pasando del ataque a la defensa: cómo escribir código seguro y arquitecturas resistentes que eliminen de raíz las vulnerabilidades vistas. Aprenderás los principios de secure coding, las defensas concretas por categoría OWASP y cómo integrarlas en el ciclo de desarrollo (DevSecOps).</a:t>
+              <a:t>•  Cerrar la parte pasando del ataque a la defensa: cómo escribir código seguro y arquitecturas resistentes que eliminen de raíz las vulnerabilidades vistas. Aprenderás los principios de secure coding…</a:t>
             </a:r>
           </a:p>
         </p:txBody>
@@ -4077,7 +4423,7 @@
                   <a:srgbClr val="0B3D2E"/>
                 </a:solidFill>
               </a:rPr>
-              <a:t>📖 Definiciones y características</a:t>
+              <a:t>🧠 Explicación en profundidad</a:t>
             </a:r>
           </a:p>
         </p:txBody>
@@ -4115,82 +4461,97 @@
                   <a:srgbClr val="22282E"/>
                 </a:solidFill>
               </a:rPr>
-              <a:t>•  Secure coding: prácticas de programación que previenen vulnerabilidades. Característica: es más barato prevenir que parchear.</a:t>
-            </a:r>
-          </a:p>
-          <a:p>
-            <a:pPr>
-              <a:spcAft>
-                <a:spcPts val="600"/>
-              </a:spcAft>
-            </a:pPr>
-            <a:r>
-              <a:rPr sz="1500">
-                <a:solidFill>
-                  <a:srgbClr val="22282E"/>
-                </a:solidFill>
-              </a:rPr>
-              <a:t>•  Defensa en profundidad: múltiples capas de control. Característica: si una falla, otra contiene el daño.</a:t>
-            </a:r>
-          </a:p>
-          <a:p>
-            <a:pPr>
-              <a:spcAft>
-                <a:spcPts val="600"/>
-              </a:spcAft>
-            </a:pPr>
-            <a:r>
-              <a:rPr sz="1500">
-                <a:solidFill>
-                  <a:srgbClr val="22282E"/>
-                </a:solidFill>
-              </a:rPr>
-              <a:t>•  Mínimo privilegio: cada componente solo con los permisos necesarios. Característica: limita el impacto de un compromiso.</a:t>
-            </a:r>
-          </a:p>
-          <a:p>
-            <a:pPr>
-              <a:spcAft>
-                <a:spcPts val="600"/>
-              </a:spcAft>
-            </a:pPr>
-            <a:r>
-              <a:rPr sz="1500">
-                <a:solidFill>
-                  <a:srgbClr val="22282E"/>
-                </a:solidFill>
-              </a:rPr>
-              <a:t>•  CSP (Content Security Policy): cabecera que restringe recursos ejecutables. Característica: mitiga XSS aunque exista el bug.</a:t>
-            </a:r>
-          </a:p>
-          <a:p>
-            <a:pPr>
-              <a:spcAft>
-                <a:spcPts val="600"/>
-              </a:spcAft>
-            </a:pPr>
-            <a:r>
-              <a:rPr sz="1500">
-                <a:solidFill>
-                  <a:srgbClr val="22282E"/>
-                </a:solidFill>
-              </a:rPr>
-              <a:t>•  ASVS: estándar de verificación de OWASP con requisitos por nivel. Característica: convierte "ser seguro" en una checklist auditable.</a:t>
-            </a:r>
-          </a:p>
-          <a:p>
-            <a:pPr>
-              <a:spcAft>
-                <a:spcPts val="600"/>
-              </a:spcAft>
-            </a:pPr>
-            <a:r>
-              <a:rPr sz="1500">
-                <a:solidFill>
-                  <a:srgbClr val="22282E"/>
-                </a:solidFill>
-              </a:rPr>
-              <a:t>•  SAST/DAST/SCA: análisis estático, dinámico y de composición. Característica: automatizan la detección en el pipeline.</a:t>
+              <a:t>•  Las 29 clases anteriores enseñaron a atacar; esta las invierte para enseñar a construir seguro,</a:t>
+            </a:r>
+          </a:p>
+          <a:p>
+            <a:pPr>
+              <a:spcAft>
+                <a:spcPts val="600"/>
+              </a:spcAft>
+            </a:pPr>
+            <a:r>
+              <a:rPr sz="1500">
+                <a:solidFill>
+                  <a:srgbClr val="22282E"/>
+                </a:solidFill>
+              </a:rPr>
+              <a:t>•  y su tesis es que la seguridad es más barata y más efectiva diseñada desde el principio que</a:t>
+            </a:r>
+          </a:p>
+          <a:p>
+            <a:pPr>
+              <a:spcAft>
+                <a:spcPts val="600"/>
+              </a:spcAft>
+            </a:pPr>
+            <a:r>
+              <a:rPr sz="1500">
+                <a:solidFill>
+                  <a:srgbClr val="22282E"/>
+                </a:solidFill>
+              </a:rPr>
+              <a:t>•  parcheada al final. No es una lista de trucos, sino un conjunto de principios que, aplicados,</a:t>
+            </a:r>
+          </a:p>
+          <a:p>
+            <a:pPr>
+              <a:spcAft>
+                <a:spcPts val="600"/>
+              </a:spcAft>
+            </a:pPr>
+            <a:r>
+              <a:rPr sz="1500">
+                <a:solidFill>
+                  <a:srgbClr val="22282E"/>
+                </a:solidFill>
+              </a:rPr>
+              <a:t>•  eliminan clases enteras de vulnerabilidad en lugar de instancias sueltas. El hilo que conecta casi</a:t>
+            </a:r>
+          </a:p>
+          <a:p>
+            <a:pPr>
+              <a:spcAft>
+                <a:spcPts val="600"/>
+              </a:spcAft>
+            </a:pPr>
+            <a:r>
+              <a:rPr sz="1500">
+                <a:solidFill>
+                  <a:srgbClr val="22282E"/>
+                </a:solidFill>
+              </a:rPr>
+              <a:t>•  todo lo visto es uno solo: no confiar en la entrada y no mezclar datos con código. Quien</a:t>
+            </a:r>
+          </a:p>
+          <a:p>
+            <a:pPr>
+              <a:spcAft>
+                <a:spcPts val="600"/>
+              </a:spcAft>
+            </a:pPr>
+            <a:r>
+              <a:rPr sz="1500">
+                <a:solidFill>
+                  <a:srgbClr val="22282E"/>
+                </a:solidFill>
+              </a:rPr>
+              <a:t>•  interioriza eso ya tiene el 80% del secure coding.</a:t>
+            </a:r>
+          </a:p>
+          <a:p>
+            <a:pPr>
+              <a:spcAft>
+                <a:spcPts val="600"/>
+              </a:spcAft>
+            </a:pPr>
+            <a:r>
+              <a:rPr sz="1500">
+                <a:solidFill>
+                  <a:srgbClr val="22282E"/>
+                </a:solidFill>
+              </a:rPr>
+              <a:t>•  Cada categoría de riesgo tiene su defensa raíz, y ordenarlas es el resumen de la parte. Contra la</a:t>
             </a:r>
           </a:p>
         </p:txBody>
@@ -4241,7 +4602,7 @@
                   <a:srgbClr val="0B3D2E"/>
                 </a:solidFill>
               </a:rPr>
-              <a:t>🧰 Herramientas y preparación</a:t>
+              <a:t>📖 Definiciones y características</a:t>
             </a:r>
           </a:p>
         </p:txBody>
@@ -4279,67 +4640,82 @@
                   <a:srgbClr val="22282E"/>
                 </a:solidFill>
               </a:rPr>
-              <a:t>•  OWASP ASVS y OWASP Cheat Sheet Series.</a:t>
-            </a:r>
-          </a:p>
-          <a:p>
-            <a:pPr>
-              <a:spcAft>
-                <a:spcPts val="600"/>
-              </a:spcAft>
-            </a:pPr>
-            <a:r>
-              <a:rPr sz="1500">
-                <a:solidFill>
-                  <a:srgbClr val="22282E"/>
-                </a:solidFill>
-              </a:rPr>
-              <a:t>•  Semgrep (SAST), OWASP ZAP (DAST), Dependabot/Trivy/OWASP Dependency-Check (SCA).</a:t>
-            </a:r>
-          </a:p>
-          <a:p>
-            <a:pPr>
-              <a:spcAft>
-                <a:spcPts val="600"/>
-              </a:spcAft>
-            </a:pPr>
-            <a:r>
-              <a:rPr sz="1500">
-                <a:solidFill>
-                  <a:srgbClr val="22282E"/>
-                </a:solidFill>
-              </a:rPr>
-              <a:t>•  securityheaders.com y CSP Evaluator para revisar cabeceras.</a:t>
-            </a:r>
-          </a:p>
-          <a:p>
-            <a:pPr>
-              <a:spcAft>
-                <a:spcPts val="600"/>
-              </a:spcAft>
-            </a:pPr>
-            <a:r>
-              <a:rPr sz="1500">
-                <a:solidFill>
-                  <a:srgbClr val="22282E"/>
-                </a:solidFill>
-              </a:rPr>
-              <a:t>•  pipx install semgrep</a:t>
-            </a:r>
-          </a:p>
-          <a:p>
-            <a:pPr>
-              <a:spcAft>
-                <a:spcPts val="600"/>
-              </a:spcAft>
-            </a:pPr>
-            <a:r>
-              <a:rPr sz="1500">
-                <a:solidFill>
-                  <a:srgbClr val="22282E"/>
-                </a:solidFill>
-              </a:rPr>
-              <a:t>•  semgrep --config=auto ./tu-proyecto</a:t>
+              <a:t>•  Secure coding: prácticas de programación que previenen vulnerabilidades. Característica: es más barato prevenir que parchear.</a:t>
+            </a:r>
+          </a:p>
+          <a:p>
+            <a:pPr>
+              <a:spcAft>
+                <a:spcPts val="600"/>
+              </a:spcAft>
+            </a:pPr>
+            <a:r>
+              <a:rPr sz="1500">
+                <a:solidFill>
+                  <a:srgbClr val="22282E"/>
+                </a:solidFill>
+              </a:rPr>
+              <a:t>•  Defensa en profundidad: múltiples capas de control. Característica: si una falla, otra contiene el daño.</a:t>
+            </a:r>
+          </a:p>
+          <a:p>
+            <a:pPr>
+              <a:spcAft>
+                <a:spcPts val="600"/>
+              </a:spcAft>
+            </a:pPr>
+            <a:r>
+              <a:rPr sz="1500">
+                <a:solidFill>
+                  <a:srgbClr val="22282E"/>
+                </a:solidFill>
+              </a:rPr>
+              <a:t>•  Mínimo privilegio: cada componente solo con los permisos necesarios. Característica: limita el impacto de un compromiso.</a:t>
+            </a:r>
+          </a:p>
+          <a:p>
+            <a:pPr>
+              <a:spcAft>
+                <a:spcPts val="600"/>
+              </a:spcAft>
+            </a:pPr>
+            <a:r>
+              <a:rPr sz="1500">
+                <a:solidFill>
+                  <a:srgbClr val="22282E"/>
+                </a:solidFill>
+              </a:rPr>
+              <a:t>•  CSP (Content Security Policy): cabecera que restringe recursos ejecutables. Característica: mitiga XSS aunque exista el bug.</a:t>
+            </a:r>
+          </a:p>
+          <a:p>
+            <a:pPr>
+              <a:spcAft>
+                <a:spcPts val="600"/>
+              </a:spcAft>
+            </a:pPr>
+            <a:r>
+              <a:rPr sz="1500">
+                <a:solidFill>
+                  <a:srgbClr val="22282E"/>
+                </a:solidFill>
+              </a:rPr>
+              <a:t>•  ASVS: estándar de verificación de OWASP con requisitos por nivel. Característica: convierte "ser seguro" en una checklist auditable.</a:t>
+            </a:r>
+          </a:p>
+          <a:p>
+            <a:pPr>
+              <a:spcAft>
+                <a:spcPts val="600"/>
+              </a:spcAft>
+            </a:pPr>
+            <a:r>
+              <a:rPr sz="1500">
+                <a:solidFill>
+                  <a:srgbClr val="22282E"/>
+                </a:solidFill>
+              </a:rPr>
+              <a:t>•  SAST/DAST/SCA: análisis estático, dinámico y de composición. Característica: automatizan la detección en el pipeline.</a:t>
             </a:r>
           </a:p>
         </p:txBody>
@@ -4390,7 +4766,7 @@
                   <a:srgbClr val="0B3D2E"/>
                 </a:solidFill>
               </a:rPr>
-              <a:t>🧪 Laboratorio guiado</a:t>
+              <a:t>📔 Glosario</a:t>
             </a:r>
           </a:p>
         </p:txBody>
@@ -4428,97 +4804,97 @@
                   <a:srgbClr val="22282E"/>
                 </a:solidFill>
               </a:rPr>
-              <a:t>•  Toma un endpoint vulnerable a SQLi de clases previas y reescríbelo con consultas parametrizadas.</a:t>
-            </a:r>
-          </a:p>
-          <a:p>
-            <a:pPr>
-              <a:spcAft>
-                <a:spcPts val="600"/>
-              </a:spcAft>
-            </a:pPr>
-            <a:r>
-              <a:rPr sz="1500">
-                <a:solidFill>
-                  <a:srgbClr val="22282E"/>
-                </a:solidFill>
-              </a:rPr>
-              <a:t>•  Corrige un XSS aplicando codificación de salida por contexto y añade una CSP restrictiva.</a:t>
-            </a:r>
-          </a:p>
-          <a:p>
-            <a:pPr>
-              <a:spcAft>
-                <a:spcPts val="600"/>
-              </a:spcAft>
-            </a:pPr>
-            <a:r>
-              <a:rPr sz="1500">
-                <a:solidFill>
-                  <a:srgbClr val="22282E"/>
-                </a:solidFill>
-              </a:rPr>
-              <a:t>•  Endurece las cookies: HttpOnly, Secure, SameSite, y verifica con DevTools.</a:t>
-            </a:r>
-          </a:p>
-          <a:p>
-            <a:pPr>
-              <a:spcAft>
-                <a:spcPts val="600"/>
-              </a:spcAft>
-            </a:pPr>
-            <a:r>
-              <a:rPr sz="1500">
-                <a:solidFill>
-                  <a:srgbClr val="22282E"/>
-                </a:solidFill>
-              </a:rPr>
-              <a:t>•  Añade cabeceras de seguridad (HSTS, X-Content-Type-Options, CSP) y valida en securityheaders.com.</a:t>
-            </a:r>
-          </a:p>
-          <a:p>
-            <a:pPr>
-              <a:spcAft>
-                <a:spcPts val="600"/>
-              </a:spcAft>
-            </a:pPr>
-            <a:r>
-              <a:rPr sz="1500">
-                <a:solidFill>
-                  <a:srgbClr val="22282E"/>
-                </a:solidFill>
-              </a:rPr>
-              <a:t>•  Ejecuta Semgrep sobre un proyecto y corrige un hallazgo real.</a:t>
-            </a:r>
-          </a:p>
-          <a:p>
-            <a:pPr>
-              <a:spcAft>
-                <a:spcPts val="600"/>
-              </a:spcAft>
-            </a:pPr>
-            <a:r>
-              <a:rPr sz="1500">
-                <a:solidFill>
-                  <a:srgbClr val="22282E"/>
-                </a:solidFill>
-              </a:rPr>
-              <a:t>•  Integra un DAST baseline (ZAP) y un SCA en un pipeline de ejemplo.</a:t>
-            </a:r>
-          </a:p>
-          <a:p>
-            <a:pPr>
-              <a:spcAft>
-                <a:spcPts val="600"/>
-              </a:spcAft>
-            </a:pPr>
-            <a:r>
-              <a:rPr sz="1500">
-                <a:solidFill>
-                  <a:srgbClr val="22282E"/>
-                </a:solidFill>
-              </a:rPr>
-              <a:t>•  Audita la app contra un subconjunto de OWASP ASVS nivel 1 y documenta gaps.</a:t>
+              <a:t>•  Término — Definición concisa</a:t>
+            </a:r>
+          </a:p>
+          <a:p>
+            <a:pPr>
+              <a:spcAft>
+                <a:spcPts val="600"/>
+              </a:spcAft>
+            </a:pPr>
+            <a:r>
+              <a:rPr sz="1500">
+                <a:solidFill>
+                  <a:srgbClr val="22282E"/>
+                </a:solidFill>
+              </a:rPr>
+              <a:t>•  Secure coding — Construir software seguro por diseño, no por parche</a:t>
+            </a:r>
+          </a:p>
+          <a:p>
+            <a:pPr>
+              <a:spcAft>
+                <a:spcPts val="600"/>
+              </a:spcAft>
+            </a:pPr>
+            <a:r>
+              <a:rPr sz="1500">
+                <a:solidFill>
+                  <a:srgbClr val="22282E"/>
+                </a:solidFill>
+              </a:rPr>
+              <a:t>•  Diseño seguro — Modelar amenazas antes de programar (A04)</a:t>
+            </a:r>
+          </a:p>
+          <a:p>
+            <a:pPr>
+              <a:spcAft>
+                <a:spcPts val="600"/>
+              </a:spcAft>
+            </a:pPr>
+            <a:r>
+              <a:rPr sz="1500">
+                <a:solidFill>
+                  <a:srgbClr val="22282E"/>
+                </a:solidFill>
+              </a:rPr>
+              <a:t>•  Separar código y datos — Parametrizar, no invocar shell, no deserializar input</a:t>
+            </a:r>
+          </a:p>
+          <a:p>
+            <a:pPr>
+              <a:spcAft>
+                <a:spcPts val="600"/>
+              </a:spcAft>
+            </a:pPr>
+            <a:r>
+              <a:rPr sz="1500">
+                <a:solidFill>
+                  <a:srgbClr val="22282E"/>
+                </a:solidFill>
+              </a:rPr>
+              <a:t>•  Validación de entrada — Rechazar lo que no encaja, con allowlists</a:t>
+            </a:r>
+          </a:p>
+          <a:p>
+            <a:pPr>
+              <a:spcAft>
+                <a:spcPts val="600"/>
+              </a:spcAft>
+            </a:pPr>
+            <a:r>
+              <a:rPr sz="1500">
+                <a:solidFill>
+                  <a:srgbClr val="22282E"/>
+                </a:solidFill>
+              </a:rPr>
+              <a:t>•  Codificación de salida — Codificar el dato según su contexto; defensa primaria del XSS</a:t>
+            </a:r>
+          </a:p>
+          <a:p>
+            <a:pPr>
+              <a:spcAft>
+                <a:spcPts val="600"/>
+              </a:spcAft>
+            </a:pPr>
+            <a:r>
+              <a:rPr sz="1500">
+                <a:solidFill>
+                  <a:srgbClr val="22282E"/>
+                </a:solidFill>
+              </a:rPr>
+              <a:t>•  Autorización en servidor — Por objeto y denegando por defecto</a:t>
             </a:r>
           </a:p>
         </p:txBody>
@@ -4569,7 +4945,7 @@
                   <a:srgbClr val="0B3D2E"/>
                 </a:solidFill>
               </a:rPr>
-              <a:t>✍️ Ejercicios</a:t>
+              <a:t>🧰 Herramientas y preparación</a:t>
             </a:r>
           </a:p>
         </p:txBody>
@@ -4607,82 +4983,37 @@
                   <a:srgbClr val="22282E"/>
                 </a:solidFill>
               </a:rPr>
-              <a:t>•  Reescribe de forma segura una query vulnerable en dos lenguajes.</a:t>
-            </a:r>
-          </a:p>
-          <a:p>
-            <a:pPr>
-              <a:spcAft>
-                <a:spcPts val="600"/>
-              </a:spcAft>
-            </a:pPr>
-            <a:r>
-              <a:rPr sz="1500">
-                <a:solidFill>
-                  <a:srgbClr val="22282E"/>
-                </a:solidFill>
-              </a:rPr>
-              <a:t>•  Diseña una CSP para una SPA que solo cargue scripts propios.</a:t>
-            </a:r>
-          </a:p>
-          <a:p>
-            <a:pPr>
-              <a:spcAft>
-                <a:spcPts val="600"/>
-              </a:spcAft>
-            </a:pPr>
-            <a:r>
-              <a:rPr sz="1500">
-                <a:solidFill>
-                  <a:srgbClr val="22282E"/>
-                </a:solidFill>
-              </a:rPr>
-              <a:t>•  Configura las cookies de sesión ideales y justifícalo.</a:t>
-            </a:r>
-          </a:p>
-          <a:p>
-            <a:pPr>
-              <a:spcAft>
-                <a:spcPts val="600"/>
-              </a:spcAft>
-            </a:pPr>
-            <a:r>
-              <a:rPr sz="1500">
-                <a:solidFill>
-                  <a:srgbClr val="22282E"/>
-                </a:solidFill>
-              </a:rPr>
-              <a:t>•  Corrige un IDOR añadiendo autorización a nivel de objeto.</a:t>
-            </a:r>
-          </a:p>
-          <a:p>
-            <a:pPr>
-              <a:spcAft>
-                <a:spcPts val="600"/>
-              </a:spcAft>
-            </a:pPr>
-            <a:r>
-              <a:rPr sz="1500">
-                <a:solidFill>
-                  <a:srgbClr val="22282E"/>
-                </a:solidFill>
-              </a:rPr>
-              <a:t>•  Añade validación de entrada con allowlist en un endpoint.</a:t>
-            </a:r>
-          </a:p>
-          <a:p>
-            <a:pPr>
-              <a:spcAft>
-                <a:spcPts val="600"/>
-              </a:spcAft>
-            </a:pPr>
-            <a:r>
-              <a:rPr sz="1500">
-                <a:solidFill>
-                  <a:srgbClr val="22282E"/>
-                </a:solidFill>
-              </a:rPr>
-              <a:t>•  Mapea 10 controles de secure coding a las categorías del OWASP Top 10.</a:t>
+              <a:t>•  OWASP ASVS y OWASP Cheat Sheet Series.</a:t>
+            </a:r>
+          </a:p>
+          <a:p>
+            <a:pPr>
+              <a:spcAft>
+                <a:spcPts val="600"/>
+              </a:spcAft>
+            </a:pPr>
+            <a:r>
+              <a:rPr sz="1500">
+                <a:solidFill>
+                  <a:srgbClr val="22282E"/>
+                </a:solidFill>
+              </a:rPr>
+              <a:t>•  Semgrep (SAST), OWASP ZAP (DAST), Dependabot/Trivy/OWASP Dependency-Check (SCA).</a:t>
+            </a:r>
+          </a:p>
+          <a:p>
+            <a:pPr>
+              <a:spcAft>
+                <a:spcPts val="600"/>
+              </a:spcAft>
+            </a:pPr>
+            <a:r>
+              <a:rPr sz="1500">
+                <a:solidFill>
+                  <a:srgbClr val="22282E"/>
+                </a:solidFill>
+              </a:rPr>
+              <a:t>•  securityheaders.com y CSP Evaluator para revisar cabeceras.</a:t>
             </a:r>
           </a:p>
         </p:txBody>
@@ -4733,7 +5064,7 @@
                   <a:srgbClr val="0B3D2E"/>
                 </a:solidFill>
               </a:rPr>
-              <a:t>📝 Reto verificable</a:t>
+              <a:t>🧪 Laboratorio guiado</a:t>
             </a:r>
           </a:p>
         </p:txBody>
@@ -4771,22 +5102,97 @@
                   <a:srgbClr val="22282E"/>
                 </a:solidFill>
               </a:rPr>
-              <a:t>•  Toma una aplicación vulnerable (Juice Shop/DVWA o un proyecto propio) y corrige al menos 3 vulnerabilidades de categorías distintas, verificando que el ataque original ya no funciona.</a:t>
-            </a:r>
-          </a:p>
-          <a:p>
-            <a:pPr>
-              <a:spcAft>
-                <a:spcPts val="600"/>
-              </a:spcAft>
-            </a:pPr>
-            <a:r>
-              <a:rPr sz="1500">
-                <a:solidFill>
-                  <a:srgbClr val="22282E"/>
-                </a:solidFill>
-              </a:rPr>
-              <a:t>•  Criterio de aceptación: entregas el diff/código corregido de 3 fallos (p. ej. SQLi, XSS, IDOR), demuestras que el exploit previo falla tras el cambio, y mapeas cada corrección a su categoría OWASP y requisito ASVS.</a:t>
+              <a:t>•  Toma un endpoint vulnerable a SQLi de clases previas y reescríbelo con consultas parametrizadas.</a:t>
+            </a:r>
+          </a:p>
+          <a:p>
+            <a:pPr>
+              <a:spcAft>
+                <a:spcPts val="600"/>
+              </a:spcAft>
+            </a:pPr>
+            <a:r>
+              <a:rPr sz="1500">
+                <a:solidFill>
+                  <a:srgbClr val="22282E"/>
+                </a:solidFill>
+              </a:rPr>
+              <a:t>•  Corrige un XSS aplicando codificación de salida por contexto y añade una CSP restrictiva.</a:t>
+            </a:r>
+          </a:p>
+          <a:p>
+            <a:pPr>
+              <a:spcAft>
+                <a:spcPts val="600"/>
+              </a:spcAft>
+            </a:pPr>
+            <a:r>
+              <a:rPr sz="1500">
+                <a:solidFill>
+                  <a:srgbClr val="22282E"/>
+                </a:solidFill>
+              </a:rPr>
+              <a:t>•  Endurece las cookies: HttpOnly, Secure, SameSite, y verifica con DevTools.</a:t>
+            </a:r>
+          </a:p>
+          <a:p>
+            <a:pPr>
+              <a:spcAft>
+                <a:spcPts val="600"/>
+              </a:spcAft>
+            </a:pPr>
+            <a:r>
+              <a:rPr sz="1500">
+                <a:solidFill>
+                  <a:srgbClr val="22282E"/>
+                </a:solidFill>
+              </a:rPr>
+              <a:t>•  Añade cabeceras de seguridad (HSTS, X-Content-Type-Options, CSP) y valida en securityheaders.com.</a:t>
+            </a:r>
+          </a:p>
+          <a:p>
+            <a:pPr>
+              <a:spcAft>
+                <a:spcPts val="600"/>
+              </a:spcAft>
+            </a:pPr>
+            <a:r>
+              <a:rPr sz="1500">
+                <a:solidFill>
+                  <a:srgbClr val="22282E"/>
+                </a:solidFill>
+              </a:rPr>
+              <a:t>•  Ejecuta Semgrep sobre un proyecto y corrige un hallazgo real.</a:t>
+            </a:r>
+          </a:p>
+          <a:p>
+            <a:pPr>
+              <a:spcAft>
+                <a:spcPts val="600"/>
+              </a:spcAft>
+            </a:pPr>
+            <a:r>
+              <a:rPr sz="1500">
+                <a:solidFill>
+                  <a:srgbClr val="22282E"/>
+                </a:solidFill>
+              </a:rPr>
+              <a:t>•  Integra un DAST baseline (ZAP) y un SCA en un pipeline de ejemplo.</a:t>
+            </a:r>
+          </a:p>
+          <a:p>
+            <a:pPr>
+              <a:spcAft>
+                <a:spcPts val="600"/>
+              </a:spcAft>
+            </a:pPr>
+            <a:r>
+              <a:rPr sz="1500">
+                <a:solidFill>
+                  <a:srgbClr val="22282E"/>
+                </a:solidFill>
+              </a:rPr>
+              <a:t>•  Audita la app contra un subconjunto de OWASP ASVS nivel 1 y documenta gaps.</a:t>
             </a:r>
           </a:p>
         </p:txBody>
